--- a/docs/Vinboo-Investor-Deck.pptx
+++ b/docs/Vinboo-Investor-Deck.pptx
@@ -4926,7 +4926,7 @@
                 <a:ea typeface="Calibri" pitchFamily="34" charset="-122"/>
                 <a:cs typeface="Calibri" pitchFamily="34" charset="-120"/>
               </a:rPr>
-              <a:t>The business presenter. Exact deck fidelity, longer hand-off, unlimited screens.</a:t>
+              <a:t>The business presenter. Saved deck library, presenter notes, branding, unlimited screens.</a:t>
             </a:r>
             <a:endParaRPr lang="en-US" sz="1150" dirty="0"/>
           </a:p>
@@ -5505,7 +5505,7 @@
                 <a:ea typeface="Calibri" pitchFamily="34" charset="-122"/>
                 <a:cs typeface="Calibri" pitchFamily="34" charset="-120"/>
               </a:rPr>
-              <a:t>Four pieces of engineering, in dependency order. The first three are prerequisites to the adoption curve; the fourth is the moat.</a:t>
+              <a:t>One of these is already done. Of what is left, two are prerequisites to the adoption curve and one is the moat.</a:t>
             </a:r>
             <a:endParaRPr lang="en-US" sz="1500" dirty="0"/>
           </a:p>
@@ -5994,7 +5994,7 @@
                 <a:ea typeface="Calibri" pitchFamily="34" charset="-122"/>
                 <a:cs typeface="Calibri" pitchFamily="34" charset="-120"/>
               </a:rPr>
-              <a:t>Exact deck fidelity</a:t>
+              <a:t>Deck fidelity — done</a:t>
             </a:r>
             <a:endParaRPr lang="en-US" sz="1600" dirty="0"/>
           </a:p>
@@ -6033,7 +6033,7 @@
                 <a:ea typeface="Calibri" pitchFamily="34" charset="-122"/>
                 <a:cs typeface="Calibri" pitchFamily="34" charset="-120"/>
               </a:rPr>
-              <a:t>Server-side conversion. 37% of a real enterprise deck currently renders as placeholders. This gates the entire business tier.</a:t>
+              <a:t>Measured at 98% of slides across 32 real corporate decks, in the browser, with nothing uploaded. This was the gate on the business tier.</a:t>
             </a:r>
             <a:endParaRPr lang="en-US" sz="1200" dirty="0"/>
           </a:p>
@@ -7102,7 +7102,7 @@
                 <a:ea typeface="Calibri" pitchFamily="34" charset="-122"/>
                 <a:cs typeface="Calibri" pitchFamily="34" charset="-120"/>
               </a:rPr>
-              <a:t>The tension worth naming: encryption and server-side conversion are mutually exclusive. If the server cannot read the deck, it cannot convert it — so Private trades exact fidelity for secrecy. That is a deliberate, disclosed choice, not an oversight.</a:t>
+              <a:t>A tension that used to sit here has gone. Encryption and server-side conversion are mutually exclusive — a server cannot convert a deck it cannot read — which once meant Private would cost exact fidelity. Rendering now happens in the browser, so encryption costs the deck nothing.</a:t>
             </a:r>
             <a:endParaRPr lang="en-US" sz="1250" dirty="0"/>
           </a:p>
@@ -7436,7 +7436,7 @@
                 <a:ea typeface="Calibri" pitchFamily="34" charset="-122"/>
                 <a:cs typeface="Calibri" pitchFamily="34" charset="-120"/>
               </a:rPr>
-              <a:t>Deck fidelity blocks the business tier</a:t>
+              <a:t>Deck fidelity blocked the business tier</a:t>
             </a:r>
             <a:endParaRPr lang="en-US" sz="1350" dirty="0"/>
           </a:p>
@@ -7475,7 +7475,7 @@
                 <a:ea typeface="Calibri" pitchFamily="34" charset="-122"/>
                 <a:cs typeface="Calibri" pitchFamily="34" charset="-120"/>
               </a:rPr>
-              <a:t>37% of a real enterprise deck renders as placeholders today.</a:t>
+              <a:t>It did: 37% of one enterprise deck rendered as placeholders.</a:t>
             </a:r>
             <a:endParaRPr lang="en-US" sz="1150" dirty="0"/>
           </a:p>
@@ -7514,7 +7514,7 @@
                 <a:ea typeface="Calibri" pitchFamily="34" charset="-122"/>
                 <a:cs typeface="Calibri" pitchFamily="34" charset="-120"/>
               </a:rPr>
-              <a:t>Server-side conversion. Costed, scoped, and first in the funded roadmap.</a:t>
+              <a:t>Answered. 98% of slides across 32 real decks, measured, in the browser.</a:t>
             </a:r>
             <a:endParaRPr lang="en-US" sz="1150" dirty="0"/>
           </a:p>
@@ -11689,7 +11689,7 @@
                 <a:ea typeface="Calibri" pitchFamily="34" charset="-122"/>
                 <a:cs typeface="Calibri" pitchFamily="34" charset="-120"/>
               </a:rPr>
-              <a:t>234</a:t>
+              <a:t>98%</a:t>
             </a:r>
             <a:endParaRPr lang="en-US" sz="3800" dirty="0"/>
           </a:p>
@@ -11728,7 +11728,7 @@
                 <a:ea typeface="Calibri" pitchFamily="34" charset="-122"/>
                 <a:cs typeface="Calibri" pitchFamily="34" charset="-120"/>
               </a:rPr>
-              <a:t>automated tests passing across six suites</a:t>
+              <a:t>of slides in 32 real corporate decks render with nothing missing — in the browser, nothing uploaded</a:t>
             </a:r>
             <a:endParaRPr lang="en-US" sz="1250" dirty="0"/>
           </a:p>
@@ -11801,7 +11801,7 @@
                 <a:ea typeface="Calibri" pitchFamily="34" charset="-122"/>
                 <a:cs typeface="Calibri" pitchFamily="34" charset="-120"/>
               </a:rPr>
-              <a:t>$0</a:t>
+              <a:t>267</a:t>
             </a:r>
             <a:endParaRPr lang="en-US" sz="3800" dirty="0"/>
           </a:p>
@@ -11840,7 +11840,7 @@
                 <a:ea typeface="Calibri" pitchFamily="34" charset="-122"/>
                 <a:cs typeface="Calibri" pitchFamily="34" charset="-120"/>
               </a:rPr>
-              <a:t>of outside capital raised to date</a:t>
+              <a:t>automated tests passing across seven suites</a:t>
             </a:r>
             <a:endParaRPr lang="en-US" sz="1250" dirty="0"/>
           </a:p>
@@ -11913,7 +11913,7 @@
                 <a:ea typeface="Calibri" pitchFamily="34" charset="-122"/>
                 <a:cs typeface="Calibri" pitchFamily="34" charset="-120"/>
               </a:rPr>
-              <a:t>~$227</a:t>
+              <a:t>$0</a:t>
             </a:r>
             <a:endParaRPr lang="en-US" sz="3800" dirty="0"/>
           </a:p>
@@ -11952,7 +11952,7 @@
                 <a:ea typeface="Calibri" pitchFamily="34" charset="-122"/>
                 <a:cs typeface="Calibri" pitchFamily="34" charset="-120"/>
               </a:rPr>
-              <a:t>monthly infrastructure at first-year volumes</a:t>
+              <a:t>of outside capital raised to date</a:t>
             </a:r>
             <a:endParaRPr lang="en-US" sz="1250" dirty="0"/>
           </a:p>
@@ -12110,7 +12110,7 @@
                 <a:ea typeface="Calibri" pitchFamily="34" charset="-122"/>
                 <a:cs typeface="Calibri" pitchFamily="34" charset="-120"/>
               </a:rPr>
-              <a:t>PowerPoint rendered to vector graphics in the browser</a:t>
+              <a:t>PowerPoint, SmartArt, charts and Visio drawn in the browser</a:t>
             </a:r>
             <a:endParaRPr lang="en-US" sz="1300" dirty="0"/>
           </a:p>
@@ -12131,71 +12131,10 @@
                 <a:ea typeface="Calibri" pitchFamily="34" charset="-122"/>
                 <a:cs typeface="Calibri" pitchFamily="34" charset="-120"/>
               </a:rPr>
-              <a:t>QR joining, accounts, multiple concurrent shows, feedback</a:t>
+              <a:t>Deck fidelity measured on 32 real decks, not assumed</a:t>
             </a:r>
             <a:endParaRPr lang="en-US" sz="1300" dirty="0"/>
           </a:p>
-        </p:txBody>
-      </p:sp>
-      <p:sp>
-        <p:nvSpPr>
-          <p:cNvPr id="16" name="Text 14"/>
-          <p:cNvSpPr/>
-          <p:nvPr/>
-        </p:nvSpPr>
-        <p:spPr>
-          <a:xfrm>
-            <a:off x="6510528" y="3639312"/>
-            <a:ext cx="5029200" cy="365760"/>
-          </a:xfrm>
-          <a:prstGeom prst="rect">
-            <a:avLst/>
-          </a:prstGeom>
-          <a:noFill/>
-          <a:ln/>
-        </p:spPr>
-        <p:txBody>
-          <a:bodyPr wrap="square" lIns="0" tIns="0" rIns="0" bIns="0" rtlCol="0" anchor="ctr"/>
-          <a:lstStyle/>
-          <a:p>
-            <a:pPr indent="0" marL="0">
-              <a:buNone/>
-            </a:pPr>
-            <a:r>
-              <a:rPr lang="en-US" sz="1700" b="1" dirty="0">
-                <a:solidFill>
-                  <a:srgbClr val="C8362F"/>
-                </a:solidFill>
-                <a:latin typeface="Calibri" pitchFamily="34" charset="0"/>
-                <a:ea typeface="Calibri" pitchFamily="34" charset="-122"/>
-                <a:cs typeface="Calibri" pitchFamily="34" charset="-120"/>
-              </a:rPr>
-              <a:t>Not yet built</a:t>
-            </a:r>
-            <a:endParaRPr lang="en-US" sz="1700" dirty="0"/>
-          </a:p>
-        </p:txBody>
-      </p:sp>
-      <p:sp>
-        <p:nvSpPr>
-          <p:cNvPr id="17" name="Text 15"/>
-          <p:cNvSpPr/>
-          <p:nvPr/>
-        </p:nvSpPr>
-        <p:spPr>
-          <a:xfrm>
-            <a:off x="6510528" y="4114800"/>
-            <a:ext cx="5120640" cy="1463040"/>
-          </a:xfrm>
-          <a:prstGeom prst="rect">
-            <a:avLst/>
-          </a:prstGeom>
-          <a:noFill/>
-          <a:ln/>
-        </p:spPr>
-        <p:txBody>
-          <a:bodyPr wrap="square" lIns="0" tIns="0" rIns="0" bIns="0" rtlCol="0" anchor="t"/>
-          <a:lstStyle/>
           <a:p>
             <a:pPr marL="342900" indent="-342900">
               <a:spcAft>
@@ -12207,16 +12146,77 @@
             <a:r>
               <a:rPr lang="en-US" sz="1300" dirty="0">
                 <a:solidFill>
-                  <a:srgbClr val="6B6480"/>
-                </a:solidFill>
-                <a:latin typeface="Calibri" pitchFamily="34" charset="0"/>
-                <a:ea typeface="Calibri" pitchFamily="34" charset="-122"/>
-                <a:cs typeface="Calibri" pitchFamily="34" charset="-120"/>
-              </a:rPr>
-              <a:t>Payment processing and subscription management</a:t>
+                  <a:srgbClr val="2A2440"/>
+                </a:solidFill>
+                <a:latin typeface="Calibri" pitchFamily="34" charset="0"/>
+                <a:ea typeface="Calibri" pitchFamily="34" charset="-122"/>
+                <a:cs typeface="Calibri" pitchFamily="34" charset="-120"/>
+              </a:rPr>
+              <a:t>QR joining, accounts, multiple concurrent shows, feedback</a:t>
             </a:r>
             <a:endParaRPr lang="en-US" sz="1300" dirty="0"/>
           </a:p>
+        </p:txBody>
+      </p:sp>
+      <p:sp>
+        <p:nvSpPr>
+          <p:cNvPr id="16" name="Text 14"/>
+          <p:cNvSpPr/>
+          <p:nvPr/>
+        </p:nvSpPr>
+        <p:spPr>
+          <a:xfrm>
+            <a:off x="6510528" y="3639312"/>
+            <a:ext cx="5029200" cy="365760"/>
+          </a:xfrm>
+          <a:prstGeom prst="rect">
+            <a:avLst/>
+          </a:prstGeom>
+          <a:noFill/>
+          <a:ln/>
+        </p:spPr>
+        <p:txBody>
+          <a:bodyPr wrap="square" lIns="0" tIns="0" rIns="0" bIns="0" rtlCol="0" anchor="ctr"/>
+          <a:lstStyle/>
+          <a:p>
+            <a:pPr indent="0" marL="0">
+              <a:buNone/>
+            </a:pPr>
+            <a:r>
+              <a:rPr lang="en-US" sz="1700" b="1" dirty="0">
+                <a:solidFill>
+                  <a:srgbClr val="C8362F"/>
+                </a:solidFill>
+                <a:latin typeface="Calibri" pitchFamily="34" charset="0"/>
+                <a:ea typeface="Calibri" pitchFamily="34" charset="-122"/>
+                <a:cs typeface="Calibri" pitchFamily="34" charset="-120"/>
+              </a:rPr>
+              <a:t>Not yet built</a:t>
+            </a:r>
+            <a:endParaRPr lang="en-US" sz="1700" dirty="0"/>
+          </a:p>
+        </p:txBody>
+      </p:sp>
+      <p:sp>
+        <p:nvSpPr>
+          <p:cNvPr id="17" name="Text 15"/>
+          <p:cNvSpPr/>
+          <p:nvPr/>
+        </p:nvSpPr>
+        <p:spPr>
+          <a:xfrm>
+            <a:off x="6510528" y="4114800"/>
+            <a:ext cx="5120640" cy="1463040"/>
+          </a:xfrm>
+          <a:prstGeom prst="rect">
+            <a:avLst/>
+          </a:prstGeom>
+          <a:noFill/>
+          <a:ln/>
+        </p:spPr>
+        <p:txBody>
+          <a:bodyPr wrap="square" lIns="0" tIns="0" rIns="0" bIns="0" rtlCol="0" anchor="t"/>
+          <a:lstStyle/>
           <a:p>
             <a:pPr marL="342900" indent="-342900">
               <a:spcAft>
@@ -12234,7 +12234,28 @@
                 <a:ea typeface="Calibri" pitchFamily="34" charset="-122"/>
                 <a:cs typeface="Calibri" pitchFamily="34" charset="-120"/>
               </a:rPr>
-              <a:t>Exact server-side rendering of complex decks</a:t>
+              <a:t>Payment processing and subscription management</a:t>
+            </a:r>
+            <a:endParaRPr lang="en-US" sz="1300" dirty="0"/>
+          </a:p>
+          <a:p>
+            <a:pPr marL="342900" indent="-342900">
+              <a:spcAft>
+                <a:spcPts val="700"/>
+              </a:spcAft>
+              <a:buSzPct val="100000"/>
+              <a:buChar char="•"/>
+            </a:pPr>
+            <a:r>
+              <a:rPr lang="en-US" sz="1300" dirty="0">
+                <a:solidFill>
+                  <a:srgbClr val="6B6480"/>
+                </a:solidFill>
+                <a:latin typeface="Calibri" pitchFamily="34" charset="0"/>
+                <a:ea typeface="Calibri" pitchFamily="34" charset="-122"/>
+                <a:cs typeface="Calibri" pitchFamily="34" charset="-120"/>
+              </a:rPr>
+              <a:t>WMF metafiles and a few objects with no preview</a:t>
             </a:r>
             <a:endParaRPr lang="en-US" sz="1300" dirty="0"/>
           </a:p>

--- a/docs/Vinboo-Investor-Deck.pptx
+++ b/docs/Vinboo-Investor-Deck.pptx
@@ -136,7 +136,7 @@
           <a:lstStyle/>
           <a:p>
             <a:pPr>
-              <a:defRPr sz="1400" b="0" i="0" u="none" strike="noStrike">
+              <a:defRPr sz="1200" b="0" i="0" u="none" strike="noStrike">
                 <a:solidFill>
                   <a:srgbClr val="2A2440"/>
                 </a:solidFill>
@@ -144,13 +144,13 @@
               </a:defRPr>
             </a:pPr>
             <a:r>
-              <a:rPr sz="1400" b="0" i="0" u="none" strike="noStrike">
+              <a:rPr sz="1200" b="0" i="0" u="none" strike="noStrike">
                 <a:solidFill>
                   <a:srgbClr val="2A2440"/>
                 </a:solidFill>
                 <a:latin typeface="Calibri"/>
               </a:rPr>
-              <a:t>Revenue path ($ thousands)</a:t>
+              <a:t>Revenue path ($ thousands) — every subscriber priced at Plus</a:t>
             </a:r>
           </a:p>
         </c:rich>
@@ -4624,7 +4624,7 @@
                 <a:ea typeface="Calibri" pitchFamily="34" charset="-122"/>
                 <a:cs typeface="Calibri" pitchFamily="34" charset="-120"/>
               </a:rPr>
-              <a:t>A free tier that funds itself on advertising, and subscriptions where the revenue actually is.</a:t>
+              <a:t>Photos are free. Sharing a PowerPoint is the business tier — and anyone can open and play their own deck first, to see how it renders before paying.</a:t>
             </a:r>
             <a:endParaRPr lang="en-US" sz="1500" dirty="0"/>
           </a:p>
@@ -4639,7 +4639,7 @@
         <p:spPr>
           <a:xfrm>
             <a:off x="566928" y="1627632"/>
-            <a:ext cx="2585466" cy="1965960"/>
+            <a:ext cx="2059229" cy="1965960"/>
           </a:xfrm>
           <a:prstGeom prst="roundRect">
             <a:avLst>
@@ -4672,8 +4672,8 @@
         </p:nvSpPr>
         <p:spPr>
           <a:xfrm>
-            <a:off x="841248" y="1828800"/>
-            <a:ext cx="2036826" cy="347472"/>
+            <a:off x="786384" y="1810512"/>
+            <a:ext cx="1620317" cy="329184"/>
           </a:xfrm>
           <a:prstGeom prst="rect">
             <a:avLst/>
@@ -4689,7 +4689,7 @@
               <a:buNone/>
             </a:pPr>
             <a:r>
-              <a:rPr lang="en-US" sz="1800" b="1" dirty="0">
+              <a:rPr lang="en-US" sz="1600" b="1" dirty="0">
                 <a:solidFill>
                   <a:srgbClr val="6B6480"/>
                 </a:solidFill>
@@ -4699,7 +4699,7 @@
               </a:rPr>
               <a:t>Free</a:t>
             </a:r>
-            <a:endParaRPr lang="en-US" sz="1800" dirty="0"/>
+            <a:endParaRPr lang="en-US" sz="1600" dirty="0"/>
           </a:p>
         </p:txBody>
       </p:sp>
@@ -4711,8 +4711,8 @@
         </p:nvSpPr>
         <p:spPr>
           <a:xfrm>
-            <a:off x="841248" y="2203704"/>
-            <a:ext cx="2036826" cy="310896"/>
+            <a:off x="786384" y="2157984"/>
+            <a:ext cx="1620317" cy="292608"/>
           </a:xfrm>
           <a:prstGeom prst="rect">
             <a:avLst/>
@@ -4728,7 +4728,7 @@
               <a:buNone/>
             </a:pPr>
             <a:r>
-              <a:rPr lang="en-US" sz="1300" b="1" dirty="0">
+              <a:rPr lang="en-US" sz="1200" b="1" dirty="0">
                 <a:solidFill>
                   <a:srgbClr val="2A2440"/>
                 </a:solidFill>
@@ -4738,7 +4738,7 @@
               </a:rPr>
               <a:t>Ad supported</a:t>
             </a:r>
-            <a:endParaRPr lang="en-US" sz="1300" dirty="0"/>
+            <a:endParaRPr lang="en-US" sz="1200" dirty="0"/>
           </a:p>
         </p:txBody>
       </p:sp>
@@ -4750,8 +4750,8 @@
         </p:nvSpPr>
         <p:spPr>
           <a:xfrm>
-            <a:off x="841248" y="2560320"/>
-            <a:ext cx="2036826" cy="914400"/>
+            <a:off x="786384" y="2487168"/>
+            <a:ext cx="1620317" cy="1005840"/>
           </a:xfrm>
           <a:prstGeom prst="rect">
             <a:avLst/>
@@ -4767,7 +4767,7 @@
               <a:buNone/>
             </a:pPr>
             <a:r>
-              <a:rPr lang="en-US" sz="1150" dirty="0">
+              <a:rPr lang="en-US" sz="1050" dirty="0">
                 <a:solidFill>
                   <a:srgbClr val="6B6480"/>
                 </a:solidFill>
@@ -4775,9 +4775,9 @@
                 <a:ea typeface="Calibri" pitchFamily="34" charset="-122"/>
                 <a:cs typeface="Calibri" pitchFamily="34" charset="-120"/>
               </a:rPr>
-              <a:t>The funnel and the advertising floor. Full live sharing, limited hand-off.</a:t>
-            </a:r>
-            <a:endParaRPr lang="en-US" sz="1150" dirty="0"/>
+              <a:t>Photos to every screen. Open and play a deck locally — sharing one is Pro.</a:t>
+            </a:r>
+            <a:endParaRPr lang="en-US" sz="1050" dirty="0"/>
           </a:p>
         </p:txBody>
       </p:sp>
@@ -4789,8 +4789,159 @@
         </p:nvSpPr>
         <p:spPr>
           <a:xfrm>
-            <a:off x="3380994" y="1627632"/>
-            <a:ext cx="2585466" cy="1965960"/>
+            <a:off x="2809037" y="1627632"/>
+            <a:ext cx="2059229" cy="1965960"/>
+          </a:xfrm>
+          <a:prstGeom prst="roundRect">
+            <a:avLst>
+              <a:gd name="adj" fmla="val 5581"/>
+            </a:avLst>
+          </a:prstGeom>
+          <a:solidFill>
+            <a:srgbClr val="FFFFFF"/>
+          </a:solidFill>
+          <a:ln w="12700">
+            <a:solidFill>
+              <a:srgbClr val="FFFFFF"/>
+            </a:solidFill>
+            <a:prstDash val="solid"/>
+          </a:ln>
+          <a:effectLst>
+            <a:outerShdw sx="100000" sy="100000" kx="0" ky="0" algn="bl" rotWithShape="0" blurRad="127000" dist="25400" dir="5400000">
+              <a:srgbClr val="2A2440">
+                <a:alpha val="6000"/>
+              </a:srgbClr>
+            </a:outerShdw>
+          </a:effectLst>
+        </p:spPr>
+      </p:sp>
+      <p:sp>
+        <p:nvSpPr>
+          <p:cNvPr id="9" name="Text 7"/>
+          <p:cNvSpPr/>
+          <p:nvPr/>
+        </p:nvSpPr>
+        <p:spPr>
+          <a:xfrm>
+            <a:off x="3028493" y="1810512"/>
+            <a:ext cx="1620317" cy="329184"/>
+          </a:xfrm>
+          <a:prstGeom prst="rect">
+            <a:avLst/>
+          </a:prstGeom>
+          <a:noFill/>
+          <a:ln/>
+        </p:spPr>
+        <p:txBody>
+          <a:bodyPr wrap="square" lIns="0" tIns="0" rIns="0" bIns="0" rtlCol="0" anchor="ctr"/>
+          <a:lstStyle/>
+          <a:p>
+            <a:pPr indent="0" marL="0">
+              <a:buNone/>
+            </a:pPr>
+            <a:r>
+              <a:rPr lang="en-US" sz="1600" b="1" dirty="0">
+                <a:solidFill>
+                  <a:srgbClr val="1F7884"/>
+                </a:solidFill>
+                <a:latin typeface="Calibri" pitchFamily="34" charset="0"/>
+                <a:ea typeface="Calibri" pitchFamily="34" charset="-122"/>
+                <a:cs typeface="Calibri" pitchFamily="34" charset="-120"/>
+              </a:rPr>
+              <a:t>Plus</a:t>
+            </a:r>
+            <a:endParaRPr lang="en-US" sz="1600" dirty="0"/>
+          </a:p>
+        </p:txBody>
+      </p:sp>
+      <p:sp>
+        <p:nvSpPr>
+          <p:cNvPr id="10" name="Text 8"/>
+          <p:cNvSpPr/>
+          <p:nvPr/>
+        </p:nvSpPr>
+        <p:spPr>
+          <a:xfrm>
+            <a:off x="3028493" y="2157984"/>
+            <a:ext cx="1620317" cy="292608"/>
+          </a:xfrm>
+          <a:prstGeom prst="rect">
+            <a:avLst/>
+          </a:prstGeom>
+          <a:noFill/>
+          <a:ln/>
+        </p:spPr>
+        <p:txBody>
+          <a:bodyPr wrap="square" lIns="0" tIns="0" rIns="0" bIns="0" rtlCol="0" anchor="ctr"/>
+          <a:lstStyle/>
+          <a:p>
+            <a:pPr indent="0" marL="0">
+              <a:buNone/>
+            </a:pPr>
+            <a:r>
+              <a:rPr lang="en-US" sz="1200" b="1" dirty="0">
+                <a:solidFill>
+                  <a:srgbClr val="2A2440"/>
+                </a:solidFill>
+                <a:latin typeface="Calibri" pitchFamily="34" charset="0"/>
+                <a:ea typeface="Calibri" pitchFamily="34" charset="-122"/>
+                <a:cs typeface="Calibri" pitchFamily="34" charset="-120"/>
+              </a:rPr>
+              <a:t>$48 / year</a:t>
+            </a:r>
+            <a:endParaRPr lang="en-US" sz="1200" dirty="0"/>
+          </a:p>
+        </p:txBody>
+      </p:sp>
+      <p:sp>
+        <p:nvSpPr>
+          <p:cNvPr id="11" name="Text 9"/>
+          <p:cNvSpPr/>
+          <p:nvPr/>
+        </p:nvSpPr>
+        <p:spPr>
+          <a:xfrm>
+            <a:off x="3028493" y="2487168"/>
+            <a:ext cx="1620317" cy="1005840"/>
+          </a:xfrm>
+          <a:prstGeom prst="rect">
+            <a:avLst/>
+          </a:prstGeom>
+          <a:noFill/>
+          <a:ln/>
+        </p:spPr>
+        <p:txBody>
+          <a:bodyPr wrap="square" lIns="0" tIns="0" rIns="0" bIns="0" rtlCol="0" anchor="t"/>
+          <a:lstStyle/>
+          <a:p>
+            <a:pPr indent="0" marL="0">
+              <a:buNone/>
+            </a:pPr>
+            <a:r>
+              <a:rPr lang="en-US" sz="1050" dirty="0">
+                <a:solidFill>
+                  <a:srgbClr val="6B6480"/>
+                </a:solidFill>
+                <a:latin typeface="Calibri" pitchFamily="34" charset="0"/>
+                <a:ea typeface="Calibri" pitchFamily="34" charset="-122"/>
+                <a:cs typeface="Calibri" pitchFamily="34" charset="-120"/>
+              </a:rPr>
+              <a:t>Photos, no ads, and a show that survives everyone going offline.</a:t>
+            </a:r>
+            <a:endParaRPr lang="en-US" sz="1050" dirty="0"/>
+          </a:p>
+        </p:txBody>
+      </p:sp>
+      <p:sp>
+        <p:nvSpPr>
+          <p:cNvPr id="12" name="Shape 10"/>
+          <p:cNvSpPr/>
+          <p:nvPr/>
+        </p:nvSpPr>
+        <p:spPr>
+          <a:xfrm>
+            <a:off x="5051146" y="1627632"/>
+            <a:ext cx="2059229" cy="1965960"/>
           </a:xfrm>
           <a:prstGeom prst="roundRect">
             <a:avLst>
@@ -4817,14 +4968,14 @@
       </p:sp>
       <p:sp>
         <p:nvSpPr>
-          <p:cNvPr id="9" name="Text 7"/>
-          <p:cNvSpPr/>
-          <p:nvPr/>
-        </p:nvSpPr>
-        <p:spPr>
-          <a:xfrm>
-            <a:off x="3655314" y="1828800"/>
-            <a:ext cx="2036826" cy="347472"/>
+          <p:cNvPr id="13" name="Text 11"/>
+          <p:cNvSpPr/>
+          <p:nvPr/>
+        </p:nvSpPr>
+        <p:spPr>
+          <a:xfrm>
+            <a:off x="5270602" y="1810512"/>
+            <a:ext cx="1620317" cy="329184"/>
           </a:xfrm>
           <a:prstGeom prst="rect">
             <a:avLst/>
@@ -4840,7 +4991,7 @@
               <a:buNone/>
             </a:pPr>
             <a:r>
-              <a:rPr lang="en-US" sz="1800" b="1" dirty="0">
+              <a:rPr lang="en-US" sz="1600" b="1" dirty="0">
                 <a:solidFill>
                   <a:srgbClr val="C8362F"/>
                 </a:solidFill>
@@ -4850,20 +5001,20 @@
               </a:rPr>
               <a:t>Pro</a:t>
             </a:r>
-            <a:endParaRPr lang="en-US" sz="1800" dirty="0"/>
-          </a:p>
-        </p:txBody>
-      </p:sp>
-      <p:sp>
-        <p:nvSpPr>
-          <p:cNvPr id="10" name="Text 8"/>
-          <p:cNvSpPr/>
-          <p:nvPr/>
-        </p:nvSpPr>
-        <p:spPr>
-          <a:xfrm>
-            <a:off x="3655314" y="2203704"/>
-            <a:ext cx="2036826" cy="310896"/>
+            <a:endParaRPr lang="en-US" sz="1600" dirty="0"/>
+          </a:p>
+        </p:txBody>
+      </p:sp>
+      <p:sp>
+        <p:nvSpPr>
+          <p:cNvPr id="14" name="Text 12"/>
+          <p:cNvSpPr/>
+          <p:nvPr/>
+        </p:nvSpPr>
+        <p:spPr>
+          <a:xfrm>
+            <a:off x="5270602" y="2157984"/>
+            <a:ext cx="1620317" cy="292608"/>
           </a:xfrm>
           <a:prstGeom prst="rect">
             <a:avLst/>
@@ -4879,7 +5030,7 @@
               <a:buNone/>
             </a:pPr>
             <a:r>
-              <a:rPr lang="en-US" sz="1300" b="1" dirty="0">
+              <a:rPr lang="en-US" sz="1200" b="1" dirty="0">
                 <a:solidFill>
                   <a:srgbClr val="2A2440"/>
                 </a:solidFill>
@@ -4889,20 +5040,20 @@
               </a:rPr>
               <a:t>$180 / year</a:t>
             </a:r>
-            <a:endParaRPr lang="en-US" sz="1300" dirty="0"/>
-          </a:p>
-        </p:txBody>
-      </p:sp>
-      <p:sp>
-        <p:nvSpPr>
-          <p:cNvPr id="11" name="Text 9"/>
-          <p:cNvSpPr/>
-          <p:nvPr/>
-        </p:nvSpPr>
-        <p:spPr>
-          <a:xfrm>
-            <a:off x="3655314" y="2560320"/>
-            <a:ext cx="2036826" cy="914400"/>
+            <a:endParaRPr lang="en-US" sz="1200" dirty="0"/>
+          </a:p>
+        </p:txBody>
+      </p:sp>
+      <p:sp>
+        <p:nvSpPr>
+          <p:cNvPr id="15" name="Text 13"/>
+          <p:cNvSpPr/>
+          <p:nvPr/>
+        </p:nvSpPr>
+        <p:spPr>
+          <a:xfrm>
+            <a:off x="5270602" y="2487168"/>
+            <a:ext cx="1620317" cy="1005840"/>
           </a:xfrm>
           <a:prstGeom prst="rect">
             <a:avLst/>
@@ -4918,7 +5069,7 @@
               <a:buNone/>
             </a:pPr>
             <a:r>
-              <a:rPr lang="en-US" sz="1150" dirty="0">
+              <a:rPr lang="en-US" sz="1050" dirty="0">
                 <a:solidFill>
                   <a:srgbClr val="6B6480"/>
                 </a:solidFill>
@@ -4926,22 +5077,22 @@
                 <a:ea typeface="Calibri" pitchFamily="34" charset="-122"/>
                 <a:cs typeface="Calibri" pitchFamily="34" charset="-120"/>
               </a:rPr>
-              <a:t>The business presenter. Saved deck library, presenter notes, branding, unlimited screens.</a:t>
-            </a:r>
-            <a:endParaRPr lang="en-US" sz="1150" dirty="0"/>
-          </a:p>
-        </p:txBody>
-      </p:sp>
-      <p:sp>
-        <p:nvSpPr>
-          <p:cNvPr id="12" name="Shape 10"/>
-          <p:cNvSpPr/>
-          <p:nvPr/>
-        </p:nvSpPr>
-        <p:spPr>
-          <a:xfrm>
-            <a:off x="6195060" y="1627632"/>
-            <a:ext cx="2585466" cy="1965960"/>
+              <a:t>Sharing a PowerPoint deck. Plus a saved library, presenter notes and branding.</a:t>
+            </a:r>
+            <a:endParaRPr lang="en-US" sz="1050" dirty="0"/>
+          </a:p>
+        </p:txBody>
+      </p:sp>
+      <p:sp>
+        <p:nvSpPr>
+          <p:cNvPr id="16" name="Shape 14"/>
+          <p:cNvSpPr/>
+          <p:nvPr/>
+        </p:nvSpPr>
+        <p:spPr>
+          <a:xfrm>
+            <a:off x="7293254" y="1627632"/>
+            <a:ext cx="2059229" cy="1965960"/>
           </a:xfrm>
           <a:prstGeom prst="roundRect">
             <a:avLst>
@@ -4968,14 +5119,14 @@
       </p:sp>
       <p:sp>
         <p:nvSpPr>
-          <p:cNvPr id="13" name="Text 11"/>
-          <p:cNvSpPr/>
-          <p:nvPr/>
-        </p:nvSpPr>
-        <p:spPr>
-          <a:xfrm>
-            <a:off x="6469380" y="1828800"/>
-            <a:ext cx="2036826" cy="347472"/>
+          <p:cNvPr id="17" name="Text 15"/>
+          <p:cNvSpPr/>
+          <p:nvPr/>
+        </p:nvSpPr>
+        <p:spPr>
+          <a:xfrm>
+            <a:off x="7512710" y="1810512"/>
+            <a:ext cx="1620317" cy="329184"/>
           </a:xfrm>
           <a:prstGeom prst="rect">
             <a:avLst/>
@@ -4991,7 +5142,7 @@
               <a:buNone/>
             </a:pPr>
             <a:r>
-              <a:rPr lang="en-US" sz="1800" b="1" dirty="0">
+              <a:rPr lang="en-US" sz="1600" b="1" dirty="0">
                 <a:solidFill>
                   <a:srgbClr val="936A10"/>
                 </a:solidFill>
@@ -5001,20 +5152,20 @@
               </a:rPr>
               <a:t>Events</a:t>
             </a:r>
-            <a:endParaRPr lang="en-US" sz="1800" dirty="0"/>
-          </a:p>
-        </p:txBody>
-      </p:sp>
-      <p:sp>
-        <p:nvSpPr>
-          <p:cNvPr id="14" name="Text 12"/>
-          <p:cNvSpPr/>
-          <p:nvPr/>
-        </p:nvSpPr>
-        <p:spPr>
-          <a:xfrm>
-            <a:off x="6469380" y="2203704"/>
-            <a:ext cx="2036826" cy="310896"/>
+            <a:endParaRPr lang="en-US" sz="1600" dirty="0"/>
+          </a:p>
+        </p:txBody>
+      </p:sp>
+      <p:sp>
+        <p:nvSpPr>
+          <p:cNvPr id="18" name="Text 16"/>
+          <p:cNvSpPr/>
+          <p:nvPr/>
+        </p:nvSpPr>
+        <p:spPr>
+          <a:xfrm>
+            <a:off x="7512710" y="2157984"/>
+            <a:ext cx="1620317" cy="292608"/>
           </a:xfrm>
           <a:prstGeom prst="rect">
             <a:avLst/>
@@ -5030,7 +5181,7 @@
               <a:buNone/>
             </a:pPr>
             <a:r>
-              <a:rPr lang="en-US" sz="1300" b="1" dirty="0">
+              <a:rPr lang="en-US" sz="1200" b="1" dirty="0">
                 <a:solidFill>
                   <a:srgbClr val="2A2440"/>
                 </a:solidFill>
@@ -5040,20 +5191,20 @@
               </a:rPr>
               <a:t>$19 / event</a:t>
             </a:r>
-            <a:endParaRPr lang="en-US" sz="1300" dirty="0"/>
-          </a:p>
-        </p:txBody>
-      </p:sp>
-      <p:sp>
-        <p:nvSpPr>
-          <p:cNvPr id="15" name="Text 13"/>
-          <p:cNvSpPr/>
-          <p:nvPr/>
-        </p:nvSpPr>
-        <p:spPr>
-          <a:xfrm>
-            <a:off x="6469380" y="2560320"/>
-            <a:ext cx="2036826" cy="914400"/>
+            <a:endParaRPr lang="en-US" sz="1200" dirty="0"/>
+          </a:p>
+        </p:txBody>
+      </p:sp>
+      <p:sp>
+        <p:nvSpPr>
+          <p:cNvPr id="19" name="Text 17"/>
+          <p:cNvSpPr/>
+          <p:nvPr/>
+        </p:nvSpPr>
+        <p:spPr>
+          <a:xfrm>
+            <a:off x="7512710" y="2487168"/>
+            <a:ext cx="1620317" cy="1005840"/>
           </a:xfrm>
           <a:prstGeom prst="rect">
             <a:avLst/>
@@ -5069,7 +5220,7 @@
               <a:buNone/>
             </a:pPr>
             <a:r>
-              <a:rPr lang="en-US" sz="1150" dirty="0">
+              <a:rPr lang="en-US" sz="1050" dirty="0">
                 <a:solidFill>
                   <a:srgbClr val="6B6480"/>
                 </a:solidFill>
@@ -5079,20 +5230,20 @@
               </a:rPr>
               <a:t>One-time pass sold through wedding and event vendors.</a:t>
             </a:r>
-            <a:endParaRPr lang="en-US" sz="1150" dirty="0"/>
-          </a:p>
-        </p:txBody>
-      </p:sp>
-      <p:sp>
-        <p:nvSpPr>
-          <p:cNvPr id="16" name="Shape 14"/>
-          <p:cNvSpPr/>
-          <p:nvPr/>
-        </p:nvSpPr>
-        <p:spPr>
-          <a:xfrm>
-            <a:off x="9009126" y="1627632"/>
-            <a:ext cx="2585466" cy="1965960"/>
+            <a:endParaRPr lang="en-US" sz="1050" dirty="0"/>
+          </a:p>
+        </p:txBody>
+      </p:sp>
+      <p:sp>
+        <p:nvSpPr>
+          <p:cNvPr id="20" name="Shape 18"/>
+          <p:cNvSpPr/>
+          <p:nvPr/>
+        </p:nvSpPr>
+        <p:spPr>
+          <a:xfrm>
+            <a:off x="9535363" y="1627632"/>
+            <a:ext cx="2059229" cy="1965960"/>
           </a:xfrm>
           <a:prstGeom prst="roundRect">
             <a:avLst>
@@ -5119,14 +5270,14 @@
       </p:sp>
       <p:sp>
         <p:nvSpPr>
-          <p:cNvPr id="17" name="Text 15"/>
-          <p:cNvSpPr/>
-          <p:nvPr/>
-        </p:nvSpPr>
-        <p:spPr>
-          <a:xfrm>
-            <a:off x="9283446" y="1828800"/>
-            <a:ext cx="2036826" cy="347472"/>
+          <p:cNvPr id="21" name="Text 19"/>
+          <p:cNvSpPr/>
+          <p:nvPr/>
+        </p:nvSpPr>
+        <p:spPr>
+          <a:xfrm>
+            <a:off x="9754819" y="1810512"/>
+            <a:ext cx="1620317" cy="329184"/>
           </a:xfrm>
           <a:prstGeom prst="rect">
             <a:avLst/>
@@ -5142,7 +5293,7 @@
               <a:buNone/>
             </a:pPr>
             <a:r>
-              <a:rPr lang="en-US" sz="1800" b="1" dirty="0">
+              <a:rPr lang="en-US" sz="1600" b="1" dirty="0">
                 <a:solidFill>
                   <a:srgbClr val="1F7884"/>
                 </a:solidFill>
@@ -5152,20 +5303,20 @@
               </a:rPr>
               <a:t>Private</a:t>
             </a:r>
-            <a:endParaRPr lang="en-US" sz="1800" dirty="0"/>
-          </a:p>
-        </p:txBody>
-      </p:sp>
-      <p:sp>
-        <p:nvSpPr>
-          <p:cNvPr id="18" name="Text 16"/>
-          <p:cNvSpPr/>
-          <p:nvPr/>
-        </p:nvSpPr>
-        <p:spPr>
-          <a:xfrm>
-            <a:off x="9283446" y="2203704"/>
-            <a:ext cx="2036826" cy="310896"/>
+            <a:endParaRPr lang="en-US" sz="1600" dirty="0"/>
+          </a:p>
+        </p:txBody>
+      </p:sp>
+      <p:sp>
+        <p:nvSpPr>
+          <p:cNvPr id="22" name="Text 20"/>
+          <p:cNvSpPr/>
+          <p:nvPr/>
+        </p:nvSpPr>
+        <p:spPr>
+          <a:xfrm>
+            <a:off x="9754819" y="2157984"/>
+            <a:ext cx="1620317" cy="292608"/>
           </a:xfrm>
           <a:prstGeom prst="rect">
             <a:avLst/>
@@ -5181,7 +5332,7 @@
               <a:buNone/>
             </a:pPr>
             <a:r>
-              <a:rPr lang="en-US" sz="1300" b="1" dirty="0">
+              <a:rPr lang="en-US" sz="1200" b="1" dirty="0">
                 <a:solidFill>
                   <a:srgbClr val="2A2440"/>
                 </a:solidFill>
@@ -5189,22 +5340,22 @@
                 <a:ea typeface="Calibri" pitchFamily="34" charset="-122"/>
                 <a:cs typeface="Calibri" pitchFamily="34" charset="-120"/>
               </a:rPr>
-              <a:t>Premium</a:t>
-            </a:r>
-            <a:endParaRPr lang="en-US" sz="1300" dirty="0"/>
-          </a:p>
-        </p:txBody>
-      </p:sp>
-      <p:sp>
-        <p:nvSpPr>
-          <p:cNvPr id="19" name="Text 17"/>
-          <p:cNvSpPr/>
-          <p:nvPr/>
-        </p:nvSpPr>
-        <p:spPr>
-          <a:xfrm>
-            <a:off x="9283446" y="2560320"/>
-            <a:ext cx="2036826" cy="914400"/>
+              <a:t>Add-on</a:t>
+            </a:r>
+            <a:endParaRPr lang="en-US" sz="1200" dirty="0"/>
+          </a:p>
+        </p:txBody>
+      </p:sp>
+      <p:sp>
+        <p:nvSpPr>
+          <p:cNvPr id="23" name="Text 21"/>
+          <p:cNvSpPr/>
+          <p:nvPr/>
+        </p:nvSpPr>
+        <p:spPr>
+          <a:xfrm>
+            <a:off x="9754819" y="2487168"/>
+            <a:ext cx="1620317" cy="1005840"/>
           </a:xfrm>
           <a:prstGeom prst="rect">
             <a:avLst/>
@@ -5220,7 +5371,7 @@
               <a:buNone/>
             </a:pPr>
             <a:r>
-              <a:rPr lang="en-US" sz="1150" dirty="0">
+              <a:rPr lang="en-US" sz="1050" dirty="0">
                 <a:solidFill>
                   <a:srgbClr val="6B6480"/>
                 </a:solidFill>
@@ -5228,15 +5379,15 @@
                 <a:ea typeface="Calibri" pitchFamily="34" charset="-122"/>
                 <a:cs typeface="Calibri" pitchFamily="34" charset="-120"/>
               </a:rPr>
-              <a:t>End-to-end encrypted. Designed, not yet built.</a:t>
-            </a:r>
-            <a:endParaRPr lang="en-US" sz="1150" dirty="0"/>
+              <a:t>End-to-end encryption, added to Plus or Pro. Designed, not yet built.</a:t>
+            </a:r>
+            <a:endParaRPr lang="en-US" sz="1050" dirty="0"/>
           </a:p>
         </p:txBody>
       </p:sp>
       <p:graphicFrame>
         <p:nvGraphicFramePr>
-          <p:cNvPr id="20" name="Chart 0" descr=""/>
+          <p:cNvPr id="24" name="Chart 0" descr=""/>
           <p:cNvGraphicFramePr/>
           <p:nvPr/>
         </p:nvGraphicFramePr>
@@ -5252,7 +5403,7 @@
       </p:graphicFrame>
       <p:sp>
         <p:nvSpPr>
-          <p:cNvPr id="21" name="Shape 18"/>
+          <p:cNvPr id="25" name="Shape 22"/>
           <p:cNvSpPr/>
           <p:nvPr/>
         </p:nvSpPr>
@@ -5286,7 +5437,7 @@
       </p:sp>
       <p:sp>
         <p:nvSpPr>
-          <p:cNvPr id="22" name="Text 19"/>
+          <p:cNvPr id="26" name="Text 23"/>
           <p:cNvSpPr/>
           <p:nvPr/>
         </p:nvSpPr>
@@ -5325,7 +5476,7 @@
       </p:sp>
       <p:sp>
         <p:nvSpPr>
-          <p:cNvPr id="23" name="Text 20"/>
+          <p:cNvPr id="27" name="Text 24"/>
           <p:cNvSpPr/>
           <p:nvPr/>
         </p:nvSpPr>
@@ -5364,7 +5515,7 @@
       </p:sp>
       <p:sp>
         <p:nvSpPr>
-          <p:cNvPr id="24" name="Text 21"/>
+          <p:cNvPr id="28" name="Text 25"/>
           <p:cNvSpPr/>
           <p:nvPr/>
         </p:nvSpPr>

--- a/docs/Vinboo-Investor-Deck.pptx
+++ b/docs/Vinboo-Investor-Deck.pptx
@@ -4926,7 +4926,7 @@
                 <a:ea typeface="Calibri" pitchFamily="34" charset="-122"/>
                 <a:cs typeface="Calibri" pitchFamily="34" charset="-120"/>
               </a:rPr>
-              <a:t>Photos, no ads, and a show that survives everyone going offline.</a:t>
+              <a:t>Photos, no ads, longer life, and a show that outlives the server restarting.</a:t>
             </a:r>
             <a:endParaRPr lang="en-US" sz="1050" dirty="0"/>
           </a:p>
